--- a/Chapter Two 1447/CSC 621 Research Methods/Lectures/Ch-12-PPTaccessible.pptx
+++ b/Chapter Two 1447/CSC 621 Research Methods/Lectures/Ch-12-PPTaccessible.pptx
@@ -2,30 +2,30 @@
 <file path=ppt/presentation.xml><?xml version="1.0" encoding="utf-8"?>
 <p:presentation xmlns:a="http://schemas.openxmlformats.org/drawingml/2006/main" xmlns:r="http://schemas.openxmlformats.org/officeDocument/2006/relationships" xmlns:p="http://schemas.openxmlformats.org/presentationml/2006/main" strictFirstAndLastChars="0" saveSubsetFonts="1" autoCompressPictures="0">
   <p:sldMasterIdLst>
-    <p:sldMasterId id="2147483659" r:id="rId1"/>
-    <p:sldMasterId id="2147483660" r:id="rId2"/>
+    <p:sldMasterId id="2147483659" r:id="rId4"/>
+    <p:sldMasterId id="2147483660" r:id="rId5"/>
   </p:sldMasterIdLst>
   <p:notesMasterIdLst>
-    <p:notesMasterId r:id="rId17"/>
+    <p:notesMasterId r:id="rId20"/>
   </p:notesMasterIdLst>
   <p:handoutMasterIdLst>
-    <p:handoutMasterId r:id="rId18"/>
+    <p:handoutMasterId r:id="rId21"/>
   </p:handoutMasterIdLst>
   <p:sldIdLst>
-    <p:sldId id="335" r:id="rId3"/>
-    <p:sldId id="307" r:id="rId4"/>
-    <p:sldId id="308" r:id="rId5"/>
-    <p:sldId id="309" r:id="rId6"/>
-    <p:sldId id="310" r:id="rId7"/>
-    <p:sldId id="311" r:id="rId8"/>
-    <p:sldId id="312" r:id="rId9"/>
-    <p:sldId id="313" r:id="rId10"/>
-    <p:sldId id="314" r:id="rId11"/>
-    <p:sldId id="320" r:id="rId12"/>
-    <p:sldId id="316" r:id="rId13"/>
-    <p:sldId id="317" r:id="rId14"/>
-    <p:sldId id="318" r:id="rId15"/>
-    <p:sldId id="334" r:id="rId16"/>
+    <p:sldId id="335" r:id="rId6"/>
+    <p:sldId id="307" r:id="rId7"/>
+    <p:sldId id="308" r:id="rId8"/>
+    <p:sldId id="309" r:id="rId9"/>
+    <p:sldId id="310" r:id="rId10"/>
+    <p:sldId id="311" r:id="rId11"/>
+    <p:sldId id="312" r:id="rId12"/>
+    <p:sldId id="313" r:id="rId13"/>
+    <p:sldId id="314" r:id="rId14"/>
+    <p:sldId id="320" r:id="rId15"/>
+    <p:sldId id="316" r:id="rId16"/>
+    <p:sldId id="317" r:id="rId17"/>
+    <p:sldId id="318" r:id="rId18"/>
+    <p:sldId id="334" r:id="rId19"/>
   </p:sldIdLst>
   <p:sldSz cx="9144000" cy="6858000" type="screen4x3"/>
   <p:notesSz cx="6858000" cy="9144000"/>
@@ -373,7 +373,7 @@
           <a:p>
             <a:fld id="{2885CB01-6679-D646-ACB3-8B04B786C15F}" type="datetimeFigureOut">
               <a:rPr lang="en-US" smtClean="0"/>
-              <a:t>10/22/2021</a:t>
+              <a:t>5/31/2026</a:t>
             </a:fld>
             <a:endParaRPr lang="en-US"/>
           </a:p>
@@ -16087,8 +16087,8 @@
         </p:nvSpPr>
         <p:spPr>
           <a:xfrm>
-            <a:off x="457200" y="256787"/>
-            <a:ext cx="8229600" cy="1144347"/>
+            <a:off x="457200" y="995451"/>
+            <a:ext cx="8229600" cy="405683"/>
           </a:xfrm>
         </p:spPr>
         <p:txBody>
@@ -16104,7 +16104,7 @@
               <a:buClrTx/>
             </a:pPr>
             <a:r>
-              <a:rPr lang="en-US" sz="3600" kern="1200" dirty="0">
+              <a:rPr lang="en-US" sz="2400" kern="1200" dirty="0">
                 <a:latin typeface="+mj-lt"/>
                 <a:ea typeface="+mj-ea"/>
                 <a:cs typeface="Times New Roman" panose="02020603050405020304" pitchFamily="18" charset="0"/>
@@ -16112,7 +16112,7 @@
               <a:t>Analyzing and Interpreting Mixed-Methods Data </a:t>
             </a:r>
             <a:r>
-              <a:rPr lang="en-US" sz="2800" kern="1200" dirty="0">
+              <a:rPr lang="en-US" sz="1800" kern="1200" dirty="0">
                 <a:latin typeface="+mj-lt"/>
                 <a:ea typeface="+mj-ea"/>
                 <a:cs typeface="Times New Roman" panose="02020603050405020304" pitchFamily="18" charset="0"/>
@@ -16291,8 +16291,8 @@
         </p:nvSpPr>
         <p:spPr>
           <a:xfrm>
-            <a:off x="457200" y="256791"/>
-            <a:ext cx="8307238" cy="1144347"/>
+            <a:off x="457200" y="995455"/>
+            <a:ext cx="8307238" cy="405683"/>
           </a:xfrm>
         </p:spPr>
         <p:txBody>
@@ -16308,7 +16308,7 @@
               <a:buClrTx/>
             </a:pPr>
             <a:r>
-              <a:rPr lang="en-US" sz="3600" kern="1200" dirty="0">
+              <a:rPr lang="en-US" sz="2400" kern="1200" dirty="0">
                 <a:latin typeface="+mj-lt"/>
                 <a:ea typeface="+mj-ea"/>
                 <a:cs typeface="Times New Roman" panose="02020603050405020304" pitchFamily="18" charset="0"/>
@@ -16316,7 +16316,7 @@
               <a:t>Analyzing and Interpreting Mixed-Methods Data </a:t>
             </a:r>
             <a:r>
-              <a:rPr lang="en-US" sz="2800" kern="1200" dirty="0">
+              <a:rPr lang="en-US" sz="1800" kern="1200" dirty="0">
                 <a:latin typeface="+mj-lt"/>
                 <a:ea typeface="+mj-ea"/>
                 <a:cs typeface="Times New Roman" panose="02020603050405020304" pitchFamily="18" charset="0"/>
@@ -17190,8 +17190,8 @@
         </p:nvSpPr>
         <p:spPr>
           <a:xfrm>
-            <a:off x="457200" y="246960"/>
-            <a:ext cx="8229600" cy="1144347"/>
+            <a:off x="457200" y="924068"/>
+            <a:ext cx="8229600" cy="467239"/>
           </a:xfrm>
         </p:spPr>
         <p:txBody>
@@ -17207,7 +17207,7 @@
               <a:buClrTx/>
             </a:pPr>
             <a:r>
-              <a:rPr lang="en-US" sz="3600" kern="1200" dirty="0">
+              <a:rPr lang="en-US" sz="2800" kern="1200" dirty="0">
                 <a:latin typeface="+mj-lt"/>
                 <a:ea typeface="+mj-ea"/>
                 <a:cs typeface="Times New Roman" panose="02020603050405020304" pitchFamily="18" charset="0"/>
@@ -17215,7 +17215,7 @@
               <a:t>Strategies for Organization and Analysis </a:t>
             </a:r>
             <a:r>
-              <a:rPr lang="en-US" sz="2800" kern="1200" dirty="0">
+              <a:rPr lang="en-US" sz="2000" kern="1200" dirty="0">
                 <a:latin typeface="+mj-lt"/>
                 <a:ea typeface="+mj-ea"/>
                 <a:cs typeface="Times New Roman" panose="02020603050405020304" pitchFamily="18" charset="0"/>
@@ -17356,8 +17356,8 @@
         </p:nvSpPr>
         <p:spPr>
           <a:xfrm>
-            <a:off x="457200" y="246962"/>
-            <a:ext cx="8229600" cy="1144347"/>
+            <a:off x="457200" y="924070"/>
+            <a:ext cx="8229600" cy="467239"/>
           </a:xfrm>
         </p:spPr>
         <p:txBody>
@@ -17373,7 +17373,7 @@
               <a:buClrTx/>
             </a:pPr>
             <a:r>
-              <a:rPr lang="en-US" sz="3600" kern="1200" dirty="0">
+              <a:rPr lang="en-US" sz="2800" kern="1200" dirty="0">
                 <a:latin typeface="+mj-lt"/>
                 <a:ea typeface="+mj-ea"/>
                 <a:cs typeface="Times New Roman" panose="02020603050405020304" pitchFamily="18" charset="0"/>
@@ -17381,7 +17381,7 @@
               <a:t>Strategies for Organization and Analysis </a:t>
             </a:r>
             <a:r>
-              <a:rPr lang="en-US" sz="2800" kern="1200" dirty="0">
+              <a:rPr lang="en-US" sz="2000" kern="1200" dirty="0">
                 <a:latin typeface="+mj-lt"/>
                 <a:ea typeface="+mj-ea"/>
                 <a:cs typeface="Times New Roman" panose="02020603050405020304" pitchFamily="18" charset="0"/>
@@ -17544,8 +17544,8 @@
         </p:nvSpPr>
         <p:spPr>
           <a:xfrm>
-            <a:off x="457200" y="246963"/>
-            <a:ext cx="8229600" cy="1144347"/>
+            <a:off x="457200" y="924071"/>
+            <a:ext cx="8229600" cy="467239"/>
           </a:xfrm>
         </p:spPr>
         <p:txBody>
@@ -17561,7 +17561,7 @@
               <a:buClrTx/>
             </a:pPr>
             <a:r>
-              <a:rPr lang="en-US" sz="3600" kern="1200" dirty="0">
+              <a:rPr lang="en-US" sz="2800" kern="1200" dirty="0">
                 <a:latin typeface="+mj-lt"/>
                 <a:ea typeface="+mj-ea"/>
                 <a:cs typeface="Times New Roman" panose="02020603050405020304" pitchFamily="18" charset="0"/>
@@ -17569,7 +17569,7 @@
               <a:t>Strategies for Organization and Analysis </a:t>
             </a:r>
             <a:r>
-              <a:rPr lang="en-US" sz="2800" kern="1200" dirty="0">
+              <a:rPr lang="en-US" sz="2000" kern="1200" dirty="0">
                 <a:latin typeface="+mj-lt"/>
                 <a:ea typeface="+mj-ea"/>
                 <a:cs typeface="Times New Roman" panose="02020603050405020304" pitchFamily="18" charset="0"/>
@@ -18210,8 +18210,8 @@
         </p:nvSpPr>
         <p:spPr>
           <a:xfrm>
-            <a:off x="457200" y="256791"/>
-            <a:ext cx="8307238" cy="1144347"/>
+            <a:off x="457200" y="995455"/>
+            <a:ext cx="8307238" cy="405683"/>
           </a:xfrm>
         </p:spPr>
         <p:txBody>
@@ -18227,7 +18227,7 @@
               <a:buClrTx/>
             </a:pPr>
             <a:r>
-              <a:rPr lang="en-US" sz="3600" kern="1200" dirty="0">
+              <a:rPr lang="en-US" sz="2400" kern="1200" dirty="0">
                 <a:latin typeface="+mj-lt"/>
                 <a:ea typeface="+mj-ea"/>
                 <a:cs typeface="Times New Roman" panose="02020603050405020304" pitchFamily="18" charset="0"/>
@@ -18235,7 +18235,7 @@
               <a:t>Analyzing and Interpreting Mixed-Methods Data </a:t>
             </a:r>
             <a:r>
-              <a:rPr lang="en-US" sz="2800" kern="1200" dirty="0">
+              <a:rPr lang="en-US" sz="1800" kern="1200" dirty="0">
                 <a:latin typeface="+mj-lt"/>
                 <a:ea typeface="+mj-ea"/>
                 <a:cs typeface="Times New Roman" panose="02020603050405020304" pitchFamily="18" charset="0"/>
@@ -19523,6 +19523,15 @@
 </file>
 
 <file path=customXml/item1.xml><?xml version="1.0" encoding="utf-8"?>
+<?mso-contentType ?>
+<FormTemplates xmlns="http://schemas.microsoft.com/sharepoint/v3/contenttype/forms">
+  <Display>DocumentLibraryForm</Display>
+  <Edit>DocumentLibraryForm</Edit>
+  <New>DocumentLibraryForm</New>
+</FormTemplates>
+</file>
+
+<file path=customXml/item2.xml><?xml version="1.0" encoding="utf-8"?>
 <ct:contentTypeSchema xmlns:ct="http://schemas.microsoft.com/office/2006/metadata/contentType" xmlns:ma="http://schemas.microsoft.com/office/2006/metadata/properties/metaAttributes" ct:_="" ma:_="" ma:contentTypeName="Document" ma:contentTypeID="0x01010086D90B95B22DD945BDFF45EB84A5E21C" ma:contentTypeVersion="12" ma:contentTypeDescription="Create a new document." ma:contentTypeScope="" ma:versionID="9ee3781bcb6633d132c89161492bb118">
   <xsd:schema xmlns:xsd="http://www.w3.org/2001/XMLSchema" xmlns:xs="http://www.w3.org/2001/XMLSchema" xmlns:p="http://schemas.microsoft.com/office/2006/metadata/properties" xmlns:ns2="7c1bd8dc-4e40-424f-a15f-9ffcd522197f" xmlns:ns3="6125ffc9-2c56-435e-8267-1393444907b2" targetNamespace="http://schemas.microsoft.com/office/2006/metadata/properties" ma:root="true" ma:fieldsID="d3e430f46b92204fb5a3381a429c4dbe" ns2:_="" ns3:_="">
     <xsd:import namespace="7c1bd8dc-4e40-424f-a15f-9ffcd522197f"/>
@@ -19739,15 +19748,6 @@
 </ct:contentTypeSchema>
 </file>
 
-<file path=customXml/item2.xml><?xml version="1.0" encoding="utf-8"?>
-<?mso-contentType ?>
-<FormTemplates xmlns="http://schemas.microsoft.com/sharepoint/v3/contenttype/forms">
-  <Display>DocumentLibraryForm</Display>
-  <Edit>DocumentLibraryForm</Edit>
-  <New>DocumentLibraryForm</New>
-</FormTemplates>
-</file>
-
 <file path=customXml/item3.xml><?xml version="1.0" encoding="utf-8"?>
 <p:properties xmlns:p="http://schemas.microsoft.com/office/2006/metadata/properties" xmlns:xsi="http://www.w3.org/2001/XMLSchema-instance" xmlns:pc="http://schemas.microsoft.com/office/infopath/2007/PartnerControls">
   <documentManagement/>
@@ -19755,13 +19755,37 @@
 </file>
 
 <file path=customXml/itemProps1.xml><?xml version="1.0" encoding="utf-8"?>
-<ds:datastoreItem xmlns:ds="http://schemas.openxmlformats.org/officeDocument/2006/customXml" ds:itemID="{F0D9777E-36FE-48BC-8EDC-BAAE40EC7F3A}"/>
+<ds:datastoreItem xmlns:ds="http://schemas.openxmlformats.org/officeDocument/2006/customXml" ds:itemID="{18DE5AC9-E1EB-4F37-B15B-E34AB020DA6D}">
+  <ds:schemaRefs>
+    <ds:schemaRef ds:uri="http://schemas.microsoft.com/sharepoint/v3/contenttype/forms"/>
+  </ds:schemaRefs>
+</ds:datastoreItem>
 </file>
 
 <file path=customXml/itemProps2.xml><?xml version="1.0" encoding="utf-8"?>
-<ds:datastoreItem xmlns:ds="http://schemas.openxmlformats.org/officeDocument/2006/customXml" ds:itemID="{18DE5AC9-E1EB-4F37-B15B-E34AB020DA6D}"/>
+<ds:datastoreItem xmlns:ds="http://schemas.openxmlformats.org/officeDocument/2006/customXml" ds:itemID="{F0D9777E-36FE-48BC-8EDC-BAAE40EC7F3A}">
+  <ds:schemaRefs>
+    <ds:schemaRef ds:uri="http://schemas.microsoft.com/office/2006/metadata/contentType"/>
+    <ds:schemaRef ds:uri="http://schemas.microsoft.com/office/2006/metadata/properties/metaAttributes"/>
+    <ds:schemaRef ds:uri="http://www.w3.org/2001/XMLSchema"/>
+    <ds:schemaRef ds:uri="http://schemas.microsoft.com/office/2006/metadata/properties"/>
+    <ds:schemaRef ds:uri="7c1bd8dc-4e40-424f-a15f-9ffcd522197f"/>
+    <ds:schemaRef ds:uri="6125ffc9-2c56-435e-8267-1393444907b2"/>
+    <ds:schemaRef ds:uri="http://schemas.microsoft.com/office/2006/documentManagement/types"/>
+    <ds:schemaRef ds:uri="http://schemas.microsoft.com/office/infopath/2007/PartnerControls"/>
+    <ds:schemaRef ds:uri="http://schemas.openxmlformats.org/package/2006/metadata/core-properties"/>
+    <ds:schemaRef ds:uri="http://purl.org/dc/elements/1.1/"/>
+    <ds:schemaRef ds:uri="http://purl.org/dc/terms/"/>
+    <ds:schemaRef ds:uri="http://schemas.microsoft.com/internal/obd"/>
+  </ds:schemaRefs>
+</ds:datastoreItem>
 </file>
 
 <file path=customXml/itemProps3.xml><?xml version="1.0" encoding="utf-8"?>
-<ds:datastoreItem xmlns:ds="http://schemas.openxmlformats.org/officeDocument/2006/customXml" ds:itemID="{0E958632-9A73-4546-B0C0-CC02CDBAA71A}"/>
+<ds:datastoreItem xmlns:ds="http://schemas.openxmlformats.org/officeDocument/2006/customXml" ds:itemID="{0E958632-9A73-4546-B0C0-CC02CDBAA71A}">
+  <ds:schemaRefs>
+    <ds:schemaRef ds:uri="http://schemas.microsoft.com/office/2006/metadata/properties"/>
+    <ds:schemaRef ds:uri="http://schemas.microsoft.com/office/infopath/2007/PartnerControls"/>
+  </ds:schemaRefs>
+</ds:datastoreItem>
 </file>